--- a/classes/parte-0-fundamentos-y-prerrequisitos/008-windows-esencial-para-seguridad-arquitectura-registro-y-servicios/clase-008-presentacion.pptx
+++ b/classes/parte-0-fundamentos-y-prerrequisitos/008-windows-esencial-para-seguridad-arquitectura-registro-y-servicios/clase-008-presentacion.pptx
@@ -17,6 +17,9 @@
     <p:sldId id="265" r:id="rId16"/>
     <p:sldId id="266" r:id="rId17"/>
     <p:sldId id="267" r:id="rId18"/>
+    <p:sldId id="268" r:id="rId19"/>
+    <p:sldId id="269" r:id="rId20"/>
+    <p:sldId id="270" r:id="rId21"/>
   </p:sldIdLst>
   <p:sldSz cx="9144000" cy="6858000" type="screen4x3"/>
   <p:notesSz cx="6858000" cy="9144000"/>
@@ -3198,7 +3201,7 @@
                   <a:srgbClr val="0B3D2E"/>
                 </a:solidFill>
               </a:rPr>
-              <a:t>⚠️ Errores comunes</a:t>
+              <a:t>✍️ Ejercicios</a:t>
             </a:r>
           </a:p>
         </p:txBody>
@@ -3236,67 +3239,97 @@
                   <a:srgbClr val="22282E"/>
                 </a:solidFill>
               </a:rPr>
-              <a:t>•  "Access is denied" al editar el Registro — Falta elevación. Abre la consola/regedit como administrador.</a:t>
-            </a:r>
-          </a:p>
-          <a:p>
-            <a:pPr>
-              <a:spcAft>
-                <a:spcPts val="600"/>
-              </a:spcAft>
-            </a:pPr>
-            <a:r>
-              <a:rPr sz="1500">
-                <a:solidFill>
-                  <a:srgbClr val="22282E"/>
-                </a:solidFill>
-              </a:rPr>
-              <a:t>•  UAC no pide confirmación al elevar — Nivel de UAC bajo o cuenta ya admin con auto-elevación. Revísalo en configuración.</a:t>
-            </a:r>
-          </a:p>
-          <a:p>
-            <a:pPr>
-              <a:spcAft>
-                <a:spcPts val="600"/>
-              </a:spcAft>
-            </a:pPr>
-            <a:r>
-              <a:rPr sz="1500">
-                <a:solidFill>
-                  <a:srgbClr val="22282E"/>
-                </a:solidFill>
-              </a:rPr>
-              <a:t>•  No ves procesos de otros usuarios — Falta privilegio. Ejecuta Process Explorer elevado.</a:t>
-            </a:r>
-          </a:p>
-          <a:p>
-            <a:pPr>
-              <a:spcAft>
-                <a:spcPts val="600"/>
-              </a:spcAft>
-            </a:pPr>
-            <a:r>
-              <a:rPr sz="1500">
-                <a:solidFill>
-                  <a:srgbClr val="22282E"/>
-                </a:solidFill>
-              </a:rPr>
-              <a:t>•  sc no encuentra el servicio — Nombre corto vs. nombre visible. Usa sc query para el nombre real.</a:t>
-            </a:r>
-          </a:p>
-          <a:p>
-            <a:pPr>
-              <a:spcAft>
-                <a:spcPts val="600"/>
-              </a:spcAft>
-            </a:pPr>
-            <a:r>
-              <a:rPr sz="1500">
-                <a:solidFill>
-                  <a:srgbClr val="22282E"/>
-                </a:solidFill>
-              </a:rPr>
-              <a:t>•  Logs de seguridad vacíos — La auditoría no está habilitada. Configúrala en directiva de auditoría.</a:t>
+              <a:t>•  Explica la diferencia entre HKLM y HKCU y qué implica para persistencia por usuario frente a por máquina.</a:t>
+            </a:r>
+          </a:p>
+          <a:p>
+            <a:pPr>
+              <a:spcAft>
+                <a:spcPts val="600"/>
+              </a:spcAft>
+            </a:pPr>
+            <a:r>
+              <a:rPr sz="1500">
+                <a:solidFill>
+                  <a:srgbClr val="22282E"/>
+                </a:solidFill>
+              </a:rPr>
+              <a:t>•  Investiga qué es SeImpersonatePrivilege y por qué es relevante para escalada de privilegios.</a:t>
+            </a:r>
+          </a:p>
+          <a:p>
+            <a:pPr>
+              <a:spcAft>
+                <a:spcPts val="600"/>
+              </a:spcAft>
+            </a:pPr>
+            <a:r>
+              <a:rPr sz="1500">
+                <a:solidFill>
+                  <a:srgbClr val="22282E"/>
+                </a:solidFill>
+              </a:rPr>
+              <a:t>•  Encuentra en tu VM un servicio con unquoted service path o razona con evidencia por qué no hay ninguno.</a:t>
+            </a:r>
+          </a:p>
+          <a:p>
+            <a:pPr>
+              <a:spcAft>
+                <a:spcPts val="600"/>
+              </a:spcAft>
+            </a:pPr>
+            <a:r>
+              <a:rPr sz="1500">
+                <a:solidFill>
+                  <a:srgbClr val="22282E"/>
+                </a:solidFill>
+              </a:rPr>
+              <a:t>•  Documenta 3 ubicaciones de persistencia distintas y cómo detectarlas con Autoruns.</a:t>
+            </a:r>
+          </a:p>
+          <a:p>
+            <a:pPr>
+              <a:spcAft>
+                <a:spcPts val="600"/>
+              </a:spcAft>
+            </a:pPr>
+            <a:r>
+              <a:rPr sz="1500">
+                <a:solidFill>
+                  <a:srgbClr val="22282E"/>
+                </a:solidFill>
+              </a:rPr>
+              <a:t>•  Compara UAC con sudo de Linux: similitudes y diferencias de modelo de privilegios.</a:t>
+            </a:r>
+          </a:p>
+          <a:p>
+            <a:pPr>
+              <a:spcAft>
+                <a:spcPts val="600"/>
+              </a:spcAft>
+            </a:pPr>
+            <a:r>
+              <a:rPr sz="1500">
+                <a:solidFill>
+                  <a:srgbClr val="22282E"/>
+                </a:solidFill>
+              </a:rPr>
+              <a:t>•  Con el Visor de eventos, distingue un login interactivo (tipo 2) de uno de red (tipo 3) por su Logon Type.</a:t>
+            </a:r>
+          </a:p>
+          <a:p>
+            <a:pPr>
+              <a:spcAft>
+                <a:spcPts val="600"/>
+              </a:spcAft>
+            </a:pPr>
+            <a:r>
+              <a:rPr sz="1500">
+                <a:solidFill>
+                  <a:srgbClr val="22282E"/>
+                </a:solidFill>
+              </a:rPr>
+              <a:t>•  Relaciona la clave Run con su técnica de MITRE ATT&amp;CK y anota el identificador.</a:t>
             </a:r>
           </a:p>
         </p:txBody>
@@ -3347,7 +3380,7 @@
                   <a:srgbClr val="0B3D2E"/>
                 </a:solidFill>
               </a:rPr>
-              <a:t>❓ Preguntas frecuentes</a:t>
+              <a:t>📝 Reto verificable</a:t>
             </a:r>
           </a:p>
         </p:txBody>
@@ -3385,52 +3418,22 @@
                   <a:srgbClr val="22282E"/>
                 </a:solidFill>
               </a:rPr>
-              <a:t>•  ❓ ¿UAC es una frontera de seguridad? Microsoft afirma que UAC no es un límite de seguridad estricto: existen técnicas de bypass. Es una barrera de conveniencia que reduce ejecución accidental con privilegios.</a:t>
-            </a:r>
-          </a:p>
-          <a:p>
-            <a:pPr>
-              <a:spcAft>
-                <a:spcPts val="600"/>
-              </a:spcAft>
-            </a:pPr>
-            <a:r>
-              <a:rPr sz="1500">
-                <a:solidFill>
-                  <a:srgbClr val="22282E"/>
-                </a:solidFill>
-              </a:rPr>
-              <a:t>•  ❓ ¿Por qué SYSTEM es tan codiciado? Es la cuenta de mayor privilegio local, por encima incluso del administrador para ciertas operaciones. Muchos servicios corren como SYSTEM, de ahí que sus fallos permitan escalada total.</a:t>
-            </a:r>
-          </a:p>
-          <a:p>
-            <a:pPr>
-              <a:spcAft>
-                <a:spcPts val="600"/>
-              </a:spcAft>
-            </a:pPr>
-            <a:r>
-              <a:rPr sz="1500">
-                <a:solidFill>
-                  <a:srgbClr val="22282E"/>
-                </a:solidFill>
-              </a:rPr>
-              <a:t>•  ❓ ¿El Registro sustituye a los archivos de configuración? En gran medida sí para Windows: centraliza configuración de SO y apps. Por eso es un objetivo tanto de persistencia como de análisis forense.</a:t>
-            </a:r>
-          </a:p>
-          <a:p>
-            <a:pPr>
-              <a:spcAft>
-                <a:spcPts val="600"/>
-              </a:spcAft>
-            </a:pPr>
-            <a:r>
-              <a:rPr sz="1500">
-                <a:solidFill>
-                  <a:srgbClr val="22282E"/>
-                </a:solidFill>
-              </a:rPr>
-              <a:t>•  ❓ ¿Necesito programar en Windows para esto? No aquí; en la Clase 009 usaremos PowerShell. Ahora basta con entender la arquitectura y saber enumerar con herramientas.</a:t>
+              <a:t>•  Realiza una mini auditoría de hardening de tu VM Windows: enumera cuentas y privilegios, identifica todas las entradas de auto-inicio con Autoruns marcando las no firmadas, y revisa los servicios en…</a:t>
+            </a:r>
+          </a:p>
+          <a:p>
+            <a:pPr>
+              <a:spcAft>
+                <a:spcPts val="600"/>
+              </a:spcAft>
+            </a:pPr>
+            <a:r>
+              <a:rPr sz="1500">
+                <a:solidFill>
+                  <a:srgbClr val="22282E"/>
+                </a:solidFill>
+              </a:rPr>
+              <a:t>•  Criterio de aceptación: el informe lista al menos 5 puntos de auto-inicio clasificados por riesgo, indica si existe algún servicio vulnerable (con evidencia del comando usado) y propone una…</a:t>
             </a:r>
           </a:p>
         </p:txBody>
@@ -3481,7 +3484,7 @@
                   <a:srgbClr val="0B3D2E"/>
                 </a:solidFill>
               </a:rPr>
-              <a:t>🔗 Referencias</a:t>
+              <a:t>⚠️ Errores comunes</a:t>
             </a:r>
           </a:p>
         </p:txBody>
@@ -3519,6 +3522,319 @@
                   <a:srgbClr val="22282E"/>
                 </a:solidFill>
               </a:rPr>
+              <a:t>•  "Access is denied" al editar el Registro — Falta elevación. Abre la consola o regedit como administrador.</a:t>
+            </a:r>
+          </a:p>
+          <a:p>
+            <a:pPr>
+              <a:spcAft>
+                <a:spcPts val="600"/>
+              </a:spcAft>
+            </a:pPr>
+            <a:r>
+              <a:rPr sz="1500">
+                <a:solidFill>
+                  <a:srgbClr val="22282E"/>
+                </a:solidFill>
+              </a:rPr>
+              <a:t>•  UAC no pide confirmación al elevar — Nivel de UAC bajo o cuenta ya administrador con auto-elevación. Revísalo en la configuración de UAC.</a:t>
+            </a:r>
+          </a:p>
+          <a:p>
+            <a:pPr>
+              <a:spcAft>
+                <a:spcPts val="600"/>
+              </a:spcAft>
+            </a:pPr>
+            <a:r>
+              <a:rPr sz="1500">
+                <a:solidFill>
+                  <a:srgbClr val="22282E"/>
+                </a:solidFill>
+              </a:rPr>
+              <a:t>•  No ves procesos de otros usuarios — Falta privilegio. Ejecuta Process Explorer elevado.</a:t>
+            </a:r>
+          </a:p>
+          <a:p>
+            <a:pPr>
+              <a:spcAft>
+                <a:spcPts val="600"/>
+              </a:spcAft>
+            </a:pPr>
+            <a:r>
+              <a:rPr sz="1500">
+                <a:solidFill>
+                  <a:srgbClr val="22282E"/>
+                </a:solidFill>
+              </a:rPr>
+              <a:t>•  sc no encuentra el servicio — Confundes el nombre corto con el visible. Usa sc query para obtener el nombre interno real.</a:t>
+            </a:r>
+          </a:p>
+          <a:p>
+            <a:pPr>
+              <a:spcAft>
+                <a:spcPts val="600"/>
+              </a:spcAft>
+            </a:pPr>
+            <a:r>
+              <a:rPr sz="1500">
+                <a:solidFill>
+                  <a:srgbClr val="22282E"/>
+                </a:solidFill>
+              </a:rPr>
+              <a:t>•  Los logs de seguridad aparecen vacíos — La auditoría no está habilitada. Actívala en la directiva de auditoría local.</a:t>
+            </a:r>
+          </a:p>
+          <a:p>
+            <a:pPr>
+              <a:spcAft>
+                <a:spcPts val="600"/>
+              </a:spcAft>
+            </a:pPr>
+            <a:r>
+              <a:rPr sz="1500">
+                <a:solidFill>
+                  <a:srgbClr val="22282E"/>
+                </a:solidFill>
+              </a:rPr>
+              <a:t>•  Marcas como vulnerable un unquoted path que no lo es — La ruta tiene espacios pero está entre comillas, o ningún directorio intermedio es escribible. Verifica ambos con icacls.</a:t>
+            </a:r>
+          </a:p>
+        </p:txBody>
+      </p:sp>
+    </p:spTree>
+  </p:cSld>
+  <p:clrMapOvr>
+    <a:masterClrMapping/>
+  </p:clrMapOvr>
+</p:sld>
+</file>
+
+<file path=ppt/slides/slide13.xml><?xml version="1.0" encoding="utf-8"?>
+<p:sld xmlns:a="http://schemas.openxmlformats.org/drawingml/2006/main" xmlns:p="http://schemas.openxmlformats.org/presentationml/2006/main" xmlns:r="http://schemas.openxmlformats.org/officeDocument/2006/relationships">
+  <p:cSld>
+    <p:spTree>
+      <p:nvGrpSpPr>
+        <p:cNvPr id="1" name=""/>
+        <p:cNvGrpSpPr/>
+        <p:nvPr/>
+      </p:nvGrpSpPr>
+      <p:grpSpPr/>
+      <p:sp>
+        <p:nvSpPr>
+          <p:cNvPr id="2" name="TextBox 1"/>
+          <p:cNvSpPr txBox="1"/>
+          <p:nvPr/>
+        </p:nvSpPr>
+        <p:spPr>
+          <a:xfrm>
+            <a:off x="457200" y="320040"/>
+            <a:ext cx="8229600" cy="822960"/>
+          </a:xfrm>
+          <a:prstGeom prst="rect">
+            <a:avLst/>
+          </a:prstGeom>
+          <a:noFill/>
+        </p:spPr>
+        <p:txBody>
+          <a:bodyPr wrap="square">
+            <a:spAutoFit/>
+          </a:bodyPr>
+          <a:lstStyle/>
+          <a:p>
+            <a:r>
+              <a:rPr sz="2600" b="1">
+                <a:solidFill>
+                  <a:srgbClr val="0B3D2E"/>
+                </a:solidFill>
+              </a:rPr>
+              <a:t>❓ Preguntas frecuentes</a:t>
+            </a:r>
+          </a:p>
+        </p:txBody>
+      </p:sp>
+      <p:sp>
+        <p:nvSpPr>
+          <p:cNvPr id="3" name="TextBox 2"/>
+          <p:cNvSpPr txBox="1"/>
+          <p:nvPr/>
+        </p:nvSpPr>
+        <p:spPr>
+          <a:xfrm>
+            <a:off x="457200" y="1280160"/>
+            <a:ext cx="8229600" cy="4937760"/>
+          </a:xfrm>
+          <a:prstGeom prst="rect">
+            <a:avLst/>
+          </a:prstGeom>
+          <a:noFill/>
+        </p:spPr>
+        <p:txBody>
+          <a:bodyPr wrap="square">
+            <a:spAutoFit/>
+          </a:bodyPr>
+          <a:lstStyle/>
+          <a:p>
+            <a:pPr>
+              <a:spcAft>
+                <a:spcPts val="600"/>
+              </a:spcAft>
+            </a:pPr>
+            <a:r>
+              <a:rPr sz="1500">
+                <a:solidFill>
+                  <a:srgbClr val="22282E"/>
+                </a:solidFill>
+              </a:rPr>
+              <a:t>•  ❓ ¿UAC es una frontera de seguridad? No. Microsoft afirma explícitamente que UAC no es un límite de seguridad estricto: existen técnicas de bypass documentadas. Es una barrera de conveniencia que…</a:t>
+            </a:r>
+          </a:p>
+          <a:p>
+            <a:pPr>
+              <a:spcAft>
+                <a:spcPts val="600"/>
+              </a:spcAft>
+            </a:pPr>
+            <a:r>
+              <a:rPr sz="1500">
+                <a:solidFill>
+                  <a:srgbClr val="22282E"/>
+                </a:solidFill>
+              </a:rPr>
+              <a:t>•  ❓ ¿Por qué SYSTEM es tan codiciado? Porque es la cuenta de mayor privilegio local, por encima incluso del administrador para ciertas operaciones sobre el propio sistema. Como muchos servicios corren…</a:t>
+            </a:r>
+          </a:p>
+          <a:p>
+            <a:pPr>
+              <a:spcAft>
+                <a:spcPts val="600"/>
+              </a:spcAft>
+            </a:pPr>
+            <a:r>
+              <a:rPr sz="1500">
+                <a:solidFill>
+                  <a:srgbClr val="22282E"/>
+                </a:solidFill>
+              </a:rPr>
+              <a:t>•  ❓ ¿El Registro sustituye a los archivos de configuración? En gran medida sí para Windows: centraliza la configuración del SO y de muchas aplicaciones. Precisamente por eso es a la vez un objetivo de…</a:t>
+            </a:r>
+          </a:p>
+          <a:p>
+            <a:pPr>
+              <a:spcAft>
+                <a:spcPts val="600"/>
+              </a:spcAft>
+            </a:pPr>
+            <a:r>
+              <a:rPr sz="1500">
+                <a:solidFill>
+                  <a:srgbClr val="22282E"/>
+                </a:solidFill>
+              </a:rPr>
+              <a:t>•  ❓ ¿Necesito programar en Windows para esto? No en esta clase; en la Clase 009 usaremos PowerShell para automatizar la enumeración. Aquí basta con entender la arquitectura y saber enumerar con…</a:t>
+            </a:r>
+          </a:p>
+        </p:txBody>
+      </p:sp>
+    </p:spTree>
+  </p:cSld>
+  <p:clrMapOvr>
+    <a:masterClrMapping/>
+  </p:clrMapOvr>
+</p:sld>
+</file>
+
+<file path=ppt/slides/slide14.xml><?xml version="1.0" encoding="utf-8"?>
+<p:sld xmlns:a="http://schemas.openxmlformats.org/drawingml/2006/main" xmlns:p="http://schemas.openxmlformats.org/presentationml/2006/main" xmlns:r="http://schemas.openxmlformats.org/officeDocument/2006/relationships">
+  <p:cSld>
+    <p:spTree>
+      <p:nvGrpSpPr>
+        <p:cNvPr id="1" name=""/>
+        <p:cNvGrpSpPr/>
+        <p:nvPr/>
+      </p:nvGrpSpPr>
+      <p:grpSpPr/>
+      <p:sp>
+        <p:nvSpPr>
+          <p:cNvPr id="2" name="TextBox 1"/>
+          <p:cNvSpPr txBox="1"/>
+          <p:nvPr/>
+        </p:nvSpPr>
+        <p:spPr>
+          <a:xfrm>
+            <a:off x="457200" y="320040"/>
+            <a:ext cx="8229600" cy="822960"/>
+          </a:xfrm>
+          <a:prstGeom prst="rect">
+            <a:avLst/>
+          </a:prstGeom>
+          <a:noFill/>
+        </p:spPr>
+        <p:txBody>
+          <a:bodyPr wrap="square">
+            <a:spAutoFit/>
+          </a:bodyPr>
+          <a:lstStyle/>
+          <a:p>
+            <a:r>
+              <a:rPr sz="2600" b="1">
+                <a:solidFill>
+                  <a:srgbClr val="0B3D2E"/>
+                </a:solidFill>
+              </a:rPr>
+              <a:t>🔗 Referencias</a:t>
+            </a:r>
+          </a:p>
+        </p:txBody>
+      </p:sp>
+      <p:sp>
+        <p:nvSpPr>
+          <p:cNvPr id="3" name="TextBox 2"/>
+          <p:cNvSpPr txBox="1"/>
+          <p:nvPr/>
+        </p:nvSpPr>
+        <p:spPr>
+          <a:xfrm>
+            <a:off x="457200" y="1280160"/>
+            <a:ext cx="8229600" cy="4937760"/>
+          </a:xfrm>
+          <a:prstGeom prst="rect">
+            <a:avLst/>
+          </a:prstGeom>
+          <a:noFill/>
+        </p:spPr>
+        <p:txBody>
+          <a:bodyPr wrap="square">
+            <a:spAutoFit/>
+          </a:bodyPr>
+          <a:lstStyle/>
+          <a:p>
+            <a:pPr>
+              <a:spcAft>
+                <a:spcPts val="600"/>
+              </a:spcAft>
+            </a:pPr>
+            <a:r>
+              <a:rPr sz="1500">
+                <a:solidFill>
+                  <a:srgbClr val="22282E"/>
+                </a:solidFill>
+              </a:rPr>
+              <a:t>•  🛠️ RootCause Windows Inspector (Apache-2.0) — sensor forense de comportamiento para Windows · lab: labs/rootcause-windows.</a:t>
+            </a:r>
+          </a:p>
+          <a:p>
+            <a:pPr>
+              <a:spcAft>
+                <a:spcPts val="600"/>
+              </a:spcAft>
+            </a:pPr>
+            <a:r>
+              <a:rPr sz="1500">
+                <a:solidFill>
+                  <a:srgbClr val="22282E"/>
+                </a:solidFill>
+              </a:rPr>
               <a:t>•  Russinovich, Solomon &amp; Ionescu, Windows Internals (Microsoft Press).</a:t>
             </a:r>
           </a:p>
@@ -3564,11 +3880,86 @@
                   <a:srgbClr val="22282E"/>
                 </a:solidFill>
               </a:rPr>
-              <a:t>•  MITRE ATT&amp;CK, técnica T1547 (Boot or Logon Autostart) — &lt;https://attack.mitre.org/techniques/T1547/&gt;</a:t>
-            </a:r>
-          </a:p>
-        </p:txBody>
-      </p:sp>
+              <a:t>•  MITRE ATT&amp;CK, técnica T1547 (Boot or Logon Autostart Execution) — &lt;https://attack.mitre.org/techniques/T1547/&gt;</a:t>
+            </a:r>
+          </a:p>
+        </p:txBody>
+      </p:sp>
+    </p:spTree>
+  </p:cSld>
+  <p:clrMapOvr>
+    <a:masterClrMapping/>
+  </p:clrMapOvr>
+</p:sld>
+</file>
+
+<file path=ppt/slides/slide15.xml><?xml version="1.0" encoding="utf-8"?>
+<p:sld xmlns:a="http://schemas.openxmlformats.org/drawingml/2006/main" xmlns:p="http://schemas.openxmlformats.org/presentationml/2006/main" xmlns:r="http://schemas.openxmlformats.org/officeDocument/2006/relationships">
+  <p:cSld>
+    <p:spTree>
+      <p:nvGrpSpPr>
+        <p:cNvPr id="1" name=""/>
+        <p:cNvGrpSpPr/>
+        <p:nvPr/>
+      </p:nvGrpSpPr>
+      <p:grpSpPr/>
+      <p:sp>
+        <p:nvSpPr>
+          <p:cNvPr id="2" name="TextBox 1"/>
+          <p:cNvSpPr txBox="1"/>
+          <p:nvPr/>
+        </p:nvSpPr>
+        <p:spPr>
+          <a:xfrm>
+            <a:off x="457200" y="274320"/>
+            <a:ext cx="8229600" cy="640080"/>
+          </a:xfrm>
+          <a:prstGeom prst="rect">
+            <a:avLst/>
+          </a:prstGeom>
+          <a:noFill/>
+        </p:spPr>
+        <p:txBody>
+          <a:bodyPr wrap="square">
+            <a:spAutoFit/>
+          </a:bodyPr>
+          <a:lstStyle/>
+          <a:p>
+            <a:r>
+              <a:rPr sz="2200" b="1">
+                <a:solidFill>
+                  <a:srgbClr val="0B3D2E"/>
+                </a:solidFill>
+              </a:rPr>
+              <a:t>Diagrama de la clase</a:t>
+            </a:r>
+          </a:p>
+        </p:txBody>
+      </p:sp>
+      <p:pic>
+        <p:nvPicPr>
+          <p:cNvPr id="3" name="Picture 2" descr="b761517a4b0c4523.png"/>
+          <p:cNvPicPr>
+            <a:picLocks noChangeAspect="1"/>
+          </p:cNvPicPr>
+          <p:nvPr/>
+        </p:nvPicPr>
+        <p:blipFill>
+          <a:blip r:embed="rId2"/>
+          <a:stretch>
+            <a:fillRect/>
+          </a:stretch>
+        </p:blipFill>
+        <p:spPr>
+          <a:xfrm>
+            <a:off x="3316037" y="1097280"/>
+            <a:ext cx="2511926" cy="5303520"/>
+          </a:xfrm>
+          <a:prstGeom prst="rect">
+            <a:avLst/>
+          </a:prstGeom>
+        </p:spPr>
+      </p:pic>
     </p:spTree>
   </p:cSld>
   <p:clrMapOvr>
@@ -3653,7 +4044,7 @@
                   <a:srgbClr val="22282E"/>
                 </a:solidFill>
               </a:rPr>
-              <a:t>•  Comprender cómo funciona Windows por dentro lo suficiente para atacarlo y defenderlo: su arquitectura, el modelo de seguridad (SID, tokens, UAC), el Registro y los servicios. Windows domina el parque corporativo, así que estos fundamentos son indispensables para el resto del programa.</a:t>
+              <a:t>•  Comprender cómo funciona Windows por dentro lo suficiente para atacarlo y defenderlo con criterio: su arquitectura de doble modo, el modelo de seguridad basado en SID y tokens, el papel de UAC, el…</a:t>
             </a:r>
           </a:p>
         </p:txBody>
@@ -3757,22 +4148,22 @@
                   <a:srgbClr val="22282E"/>
                 </a:solidFill>
               </a:rPr>
-              <a:t>•  Describir la arquitectura de Windows (user mode vs. kernel mode).</a:t>
-            </a:r>
-          </a:p>
-          <a:p>
-            <a:pPr>
-              <a:spcAft>
-                <a:spcPts val="600"/>
-              </a:spcAft>
-            </a:pPr>
-            <a:r>
-              <a:rPr sz="1500">
-                <a:solidFill>
-                  <a:srgbClr val="22282E"/>
-                </a:solidFill>
-              </a:rPr>
-              <a:t>•  Explicar el modelo de seguridad: SID, tokens de acceso y UAC.</a:t>
+              <a:t>•  Describir la arquitectura de Windows y la frontera entre user mode y kernel mode.</a:t>
+            </a:r>
+          </a:p>
+          <a:p>
+            <a:pPr>
+              <a:spcAft>
+                <a:spcPts val="600"/>
+              </a:spcAft>
+            </a:pPr>
+            <a:r>
+              <a:rPr sz="1500">
+                <a:solidFill>
+                  <a:srgbClr val="22282E"/>
+                </a:solidFill>
+              </a:rPr>
+              <a:t>•  Explicar el modelo de seguridad: SID, tokens de acceso, privilegios y UAC.</a:t>
             </a:r>
           </a:p>
           <a:p>
@@ -3802,22 +4193,37 @@
                   <a:srgbClr val="22282E"/>
                 </a:solidFill>
               </a:rPr>
-              <a:t>•  Gestionar servicios y detectar los mal configurados.</a:t>
-            </a:r>
-          </a:p>
-          <a:p>
-            <a:pPr>
-              <a:spcAft>
-                <a:spcPts val="600"/>
-              </a:spcAft>
-            </a:pPr>
-            <a:r>
-              <a:rPr sz="1500">
-                <a:solidFill>
-                  <a:srgbClr val="22282E"/>
-                </a:solidFill>
-              </a:rPr>
-              <a:t>•  Identificar rutas comunes de persistencia y escalada en Windows.</a:t>
+              <a:t>•  Gestionar servicios y detectar los mal configurados que permiten escalada.</a:t>
+            </a:r>
+          </a:p>
+          <a:p>
+            <a:pPr>
+              <a:spcAft>
+                <a:spcPts val="600"/>
+              </a:spcAft>
+            </a:pPr>
+            <a:r>
+              <a:rPr sz="1500">
+                <a:solidFill>
+                  <a:srgbClr val="22282E"/>
+                </a:solidFill>
+              </a:rPr>
+              <a:t>•  Identificar rutas comunes de persistencia y sus técnicas MITRE ATT&amp;CK asociadas.</a:t>
+            </a:r>
+          </a:p>
+          <a:p>
+            <a:pPr>
+              <a:spcAft>
+                <a:spcPts val="600"/>
+              </a:spcAft>
+            </a:pPr>
+            <a:r>
+              <a:rPr sz="1500">
+                <a:solidFill>
+                  <a:srgbClr val="22282E"/>
+                </a:solidFill>
+              </a:rPr>
+              <a:t>•  Auditar una VM enumerando cuentas, auto-inicios y servicios vulnerables.</a:t>
             </a:r>
           </a:p>
         </p:txBody>
@@ -4047,7 +4453,7 @@
                   <a:srgbClr val="0B3D2E"/>
                 </a:solidFill>
               </a:rPr>
-              <a:t>📖 Definiciones y características</a:t>
+              <a:t>🧠 Explicación en profundidad</a:t>
             </a:r>
           </a:p>
         </p:txBody>
@@ -4085,82 +4491,97 @@
                   <a:srgbClr val="22282E"/>
                 </a:solidFill>
               </a:rPr>
-              <a:t>•  User mode / Kernel mode: separación de privilegios de ejecución. Clave: el kernel accede a todo; un fallo ahí compromete el sistema.</a:t>
-            </a:r>
-          </a:p>
-          <a:p>
-            <a:pPr>
-              <a:spcAft>
-                <a:spcPts val="600"/>
-              </a:spcAft>
-            </a:pPr>
-            <a:r>
-              <a:rPr sz="1500">
-                <a:solidFill>
-                  <a:srgbClr val="22282E"/>
-                </a:solidFill>
-              </a:rPr>
-              <a:t>•  SID (Security Identifier): identificador único de cuentas/grupos. Clave: S-1-5-...; S-1-5-32-544 es Administradores.</a:t>
-            </a:r>
-          </a:p>
-          <a:p>
-            <a:pPr>
-              <a:spcAft>
-                <a:spcPts val="600"/>
-              </a:spcAft>
-            </a:pPr>
-            <a:r>
-              <a:rPr sz="1500">
-                <a:solidFill>
-                  <a:srgbClr val="22282E"/>
-                </a:solidFill>
-              </a:rPr>
-              <a:t>•  Token de acceso: estructura que porta la identidad y privilegios de un proceso. Clave: base de la suplantación y el robo de tokens.</a:t>
-            </a:r>
-          </a:p>
-          <a:p>
-            <a:pPr>
-              <a:spcAft>
-                <a:spcPts val="600"/>
-              </a:spcAft>
-            </a:pPr>
-            <a:r>
-              <a:rPr sz="1500">
-                <a:solidFill>
-                  <a:srgbClr val="22282E"/>
-                </a:solidFill>
-              </a:rPr>
-              <a:t>•  UAC (User Account Control): mecanismo que separa privilegios estándar de los de administrador. Clave: la elevación no es una frontera de seguridad infalible.</a:t>
-            </a:r>
-          </a:p>
-          <a:p>
-            <a:pPr>
-              <a:spcAft>
-                <a:spcPts val="600"/>
-              </a:spcAft>
-            </a:pPr>
-            <a:r>
-              <a:rPr sz="1500">
-                <a:solidFill>
-                  <a:srgbClr val="22282E"/>
-                </a:solidFill>
-              </a:rPr>
-              <a:t>•  Registro: base de datos jerárquica de configuración (HKLM, HKCU...). Clave: Run/RunOnce son persistencia clásica.</a:t>
-            </a:r>
-          </a:p>
-          <a:p>
-            <a:pPr>
-              <a:spcAft>
-                <a:spcPts val="600"/>
-              </a:spcAft>
-            </a:pPr>
-            <a:r>
-              <a:rPr sz="1500">
-                <a:solidFill>
-                  <a:srgbClr val="22282E"/>
-                </a:solidFill>
-              </a:rPr>
-              <a:t>•  Servicio: proceso de fondo gestionado por el SCM, a menudo con privilegios altos (SYSTEM). Clave: rutas sin comillas o permisos débiles = escalada.</a:t>
+              <a:t>•  Windows NT (el núcleo de todas las versiones modernas) divide la ejecución en dos anillos de privilegio que el hardware impone: user mode, donde corren las aplicaciones y los subsistemas con acceso…</a:t>
+            </a:r>
+          </a:p>
+          <a:p>
+            <a:pPr>
+              <a:spcAft>
+                <a:spcPts val="600"/>
+              </a:spcAft>
+            </a:pPr>
+            <a:r>
+              <a:rPr sz="1500">
+                <a:solidFill>
+                  <a:srgbClr val="22282E"/>
+                </a:solidFill>
+              </a:rPr>
+              <a:t>•  Windows no identifica a usuarios y grupos por su nombre —los nombres se pueden renombrar— sino por un SID (Security Identifier), una cadena única e inmutable con la forma S-1-5-21-.... Algunos SID…</a:t>
+            </a:r>
+          </a:p>
+          <a:p>
+            <a:pPr>
+              <a:spcAft>
+                <a:spcPts val="600"/>
+              </a:spcAft>
+            </a:pPr>
+            <a:r>
+              <a:rPr sz="1500">
+                <a:solidFill>
+                  <a:srgbClr val="22282E"/>
+                </a:solidFill>
+              </a:rPr>
+              <a:t>•  Cuando inicias sesión, el sistema construye un token de acceso: una estructura que porta tu SID, los SID de tus grupos y tu lista de privilegios (como SeDebugPrivilege, que permite depurar cualquier…</a:t>
+            </a:r>
+          </a:p>
+          <a:p>
+            <a:pPr>
+              <a:spcAft>
+                <a:spcPts val="600"/>
+              </a:spcAft>
+            </a:pPr>
+            <a:r>
+              <a:rPr sz="1500">
+                <a:solidFill>
+                  <a:srgbClr val="22282E"/>
+                </a:solidFill>
+              </a:rPr>
+              <a:t>•  UAC (User Account Control) añade un matiz: aunque seas administrador, tus procesos corren por defecto con un token filtrado que tiene los privilegios de administrador desactivados; solo al elevar (el…</a:t>
+            </a:r>
+          </a:p>
+          <a:p>
+            <a:pPr>
+              <a:spcAft>
+                <a:spcPts val="600"/>
+              </a:spcAft>
+            </a:pPr>
+            <a:r>
+              <a:rPr sz="1500">
+                <a:solidFill>
+                  <a:srgbClr val="22282E"/>
+                </a:solidFill>
+              </a:rPr>
+              <a:t>•  El Registro es una base de datos jerárquica que centraliza casi toda la configuración del sistema operativo y de las aplicaciones, organizada en colmenas raíz. Las dos que más importan en seguridad…</a:t>
+            </a:r>
+          </a:p>
+          <a:p>
+            <a:pPr>
+              <a:spcAft>
+                <a:spcPts val="600"/>
+              </a:spcAft>
+            </a:pPr>
+            <a:r>
+              <a:rPr sz="1500">
+                <a:solidFill>
+                  <a:srgbClr val="22282E"/>
+                </a:solidFill>
+              </a:rPr>
+              <a:t>•  Un servicio es un proceso de fondo gestionado por el SCM (Service Control Manager) que suele arrancar con el sistema y, a menudo, correr como SYSTEM, la cuenta de mayor privilegio local. Esa…</a:t>
+            </a:r>
+          </a:p>
+          <a:p>
+            <a:pPr>
+              <a:spcAft>
+                <a:spcPts val="600"/>
+              </a:spcAft>
+            </a:pPr>
+            <a:r>
+              <a:rPr sz="1500">
+                <a:solidFill>
+                  <a:srgbClr val="22282E"/>
+                </a:solidFill>
+              </a:rPr>
+              <a:t>•  Los procesos cargan DLLs, y el orden de búsqueda de esas bibliotecas abre la puerta al DLL hijacking (colocar una DLL maliciosa donde el proceso la cargará antes que la legítima), otra vía de…</a:t>
             </a:r>
           </a:p>
         </p:txBody>
@@ -4211,7 +4632,7 @@
                   <a:srgbClr val="0B3D2E"/>
                 </a:solidFill>
               </a:rPr>
-              <a:t>🧰 Herramientas y preparación</a:t>
+              <a:t>📖 Definiciones y características</a:t>
             </a:r>
           </a:p>
         </p:txBody>
@@ -4249,7 +4670,97 @@
                   <a:srgbClr val="22282E"/>
                 </a:solidFill>
               </a:rPr>
-              <a:t>•  Usa una VM Windows de evaluación en tu laboratorio. Instala Sysinternals Suite (Process Explorer, Autoruns, Process Monitor) desde &lt;https://learn.microsoft.com/sysinternals/&gt;. Herramientas nativas: regedit, services.msc, sc.exe, whoami /all, wevtutil, Visor de eventos. Trabaja siempre en la VM aislada.</a:t>
+              <a:t>•  User mode / Kernel mode: los dos niveles de privilegio de ejecución que impone el hardware. El kernel accede a todo el sistema; un exploit ahí compromete la máquina entera, por eso Windows firma…</a:t>
+            </a:r>
+          </a:p>
+          <a:p>
+            <a:pPr>
+              <a:spcAft>
+                <a:spcPts val="600"/>
+              </a:spcAft>
+            </a:pPr>
+            <a:r>
+              <a:rPr sz="1500">
+                <a:solidFill>
+                  <a:srgbClr val="22282E"/>
+                </a:solidFill>
+              </a:rPr>
+              <a:t>•  SID (Security Identifier): identificador único e inmutable de una cuenta o grupo (S-1-5-...). Windows autoriza por SID, no por nombre. S-1-5-18 es SYSTEM y S-1-5-32-544 el grupo Administradores.</a:t>
+            </a:r>
+          </a:p>
+          <a:p>
+            <a:pPr>
+              <a:spcAft>
+                <a:spcPts val="600"/>
+              </a:spcAft>
+            </a:pPr>
+            <a:r>
+              <a:rPr sz="1500">
+                <a:solidFill>
+                  <a:srgbClr val="22282E"/>
+                </a:solidFill>
+              </a:rPr>
+              <a:t>•  Token de acceso: estructura que porta la identidad (SID de usuario y grupos) y los privilegios de un proceso. El kernel lo compara con las ACL para autorizar. Es la base del robo y la suplantación de…</a:t>
+            </a:r>
+          </a:p>
+          <a:p>
+            <a:pPr>
+              <a:spcAft>
+                <a:spcPts val="600"/>
+              </a:spcAft>
+            </a:pPr>
+            <a:r>
+              <a:rPr sz="1500">
+                <a:solidFill>
+                  <a:srgbClr val="22282E"/>
+                </a:solidFill>
+              </a:rPr>
+              <a:t>•  Privilegio: derecho especial que otorga un token, como SeDebugPrivilege (depurar cualquier proceso) o SeImpersonatePrivilege (suplantar a un cliente). Ciertos privilegios equivalen a control total y…</a:t>
+            </a:r>
+          </a:p>
+          <a:p>
+            <a:pPr>
+              <a:spcAft>
+                <a:spcPts val="600"/>
+              </a:spcAft>
+            </a:pPr>
+            <a:r>
+              <a:rPr sz="1500">
+                <a:solidFill>
+                  <a:srgbClr val="22282E"/>
+                </a:solidFill>
+              </a:rPr>
+              <a:t>•  UAC (User Account Control): mecanismo que da a los administradores un token filtrado y exige elevación para el completo. Reduce la ejecución accidental con privilegios, pero Microsoft afirma que no…</a:t>
+            </a:r>
+          </a:p>
+          <a:p>
+            <a:pPr>
+              <a:spcAft>
+                <a:spcPts val="600"/>
+              </a:spcAft>
+            </a:pPr>
+            <a:r>
+              <a:rPr sz="1500">
+                <a:solidFill>
+                  <a:srgbClr val="22282E"/>
+                </a:solidFill>
+              </a:rPr>
+              <a:t>•  Registro: base de datos jerárquica de configuración del SO y las apps. HKLM afecta a la máquina (requiere privilegios); HKCU al usuario actual. Sus claves Run/RunOnce son persistencia clásica y…</a:t>
+            </a:r>
+          </a:p>
+          <a:p>
+            <a:pPr>
+              <a:spcAft>
+                <a:spcPts val="600"/>
+              </a:spcAft>
+            </a:pPr>
+            <a:r>
+              <a:rPr sz="1500">
+                <a:solidFill>
+                  <a:srgbClr val="22282E"/>
+                </a:solidFill>
+              </a:rPr>
+              <a:t>•  Servicio: proceso de fondo gestionado por el SCM, a menudo como SYSTEM. Rutas sin comillas (unquoted service path) o permisos débiles sobre el binario permiten escalada de privilegios.</a:t>
             </a:r>
           </a:p>
         </p:txBody>
@@ -4300,7 +4811,7 @@
                   <a:srgbClr val="0B3D2E"/>
                 </a:solidFill>
               </a:rPr>
-              <a:t>🧪 Laboratorio guiado</a:t>
+              <a:t>📔 Glosario</a:t>
             </a:r>
           </a:p>
         </p:txBody>
@@ -4338,97 +4849,97 @@
                   <a:srgbClr val="22282E"/>
                 </a:solidFill>
               </a:rPr>
-              <a:t>•  Identidad y privilegios. En una consola:</a:t>
-            </a:r>
-          </a:p>
-          <a:p>
-            <a:pPr>
-              <a:spcAft>
-                <a:spcPts val="600"/>
-              </a:spcAft>
-            </a:pPr>
-            <a:r>
-              <a:rPr sz="1500">
-                <a:solidFill>
-                  <a:srgbClr val="22282E"/>
-                </a:solidFill>
-              </a:rPr>
-              <a:t>•  whoami /all</a:t>
-            </a:r>
-          </a:p>
-          <a:p>
-            <a:pPr>
-              <a:spcAft>
-                <a:spcPts val="600"/>
-              </a:spcAft>
-            </a:pPr>
-            <a:r>
-              <a:rPr sz="1500">
-                <a:solidFill>
-                  <a:srgbClr val="22282E"/>
-                </a:solidFill>
-              </a:rPr>
-              <a:t>•  Localiza tu SID, grupos y la lista de privilegios (SeDebugPrivilege, etc.).</a:t>
-            </a:r>
-          </a:p>
-          <a:p>
-            <a:pPr>
-              <a:spcAft>
-                <a:spcPts val="600"/>
-              </a:spcAft>
-            </a:pPr>
-            <a:r>
-              <a:rPr sz="1500">
-                <a:solidFill>
-                  <a:srgbClr val="22282E"/>
-                </a:solidFill>
-              </a:rPr>
-              <a:t>•  Explorar procesos con Process Explorer: observa el árbol, el usuario de cada proceso y las DLLs cargadas de uno.</a:t>
-            </a:r>
-          </a:p>
-          <a:p>
-            <a:pPr>
-              <a:spcAft>
-                <a:spcPts val="600"/>
-              </a:spcAft>
-            </a:pPr>
-            <a:r>
-              <a:rPr sz="1500">
-                <a:solidFill>
-                  <a:srgbClr val="22282E"/>
-                </a:solidFill>
-              </a:rPr>
-              <a:t>•  Registro y persistencia. Abre regedit y navega a:</a:t>
-            </a:r>
-          </a:p>
-          <a:p>
-            <a:pPr>
-              <a:spcAft>
-                <a:spcPts val="600"/>
-              </a:spcAft>
-            </a:pPr>
-            <a:r>
-              <a:rPr sz="1500">
-                <a:solidFill>
-                  <a:srgbClr val="22282E"/>
-                </a:solidFill>
-              </a:rPr>
-              <a:t>•  HKCU\Software\Microsoft\Windows\CurrentVersion\Run</a:t>
-            </a:r>
-          </a:p>
-          <a:p>
-            <a:pPr>
-              <a:spcAft>
-                <a:spcPts val="600"/>
-              </a:spcAft>
-            </a:pPr>
-            <a:r>
-              <a:rPr sz="1500">
-                <a:solidFill>
-                  <a:srgbClr val="22282E"/>
-                </a:solidFill>
-              </a:rPr>
-              <a:t>•  HKLM\Software\Microsoft\Windows\CurrentVersion\Run</a:t>
+              <a:t>•  Término — Definición concisa</a:t>
+            </a:r>
+          </a:p>
+          <a:p>
+            <a:pPr>
+              <a:spcAft>
+                <a:spcPts val="600"/>
+              </a:spcAft>
+            </a:pPr>
+            <a:r>
+              <a:rPr sz="1500">
+                <a:solidFill>
+                  <a:srgbClr val="22282E"/>
+                </a:solidFill>
+              </a:rPr>
+              <a:t>•  NT — Núcleo de las versiones modernas de Windows</a:t>
+            </a:r>
+          </a:p>
+          <a:p>
+            <a:pPr>
+              <a:spcAft>
+                <a:spcPts val="600"/>
+              </a:spcAft>
+            </a:pPr>
+            <a:r>
+              <a:rPr sz="1500">
+                <a:solidFill>
+                  <a:srgbClr val="22282E"/>
+                </a:solidFill>
+              </a:rPr>
+              <a:t>•  HAL — Capa de abstracción de hardware en kernel mode</a:t>
+            </a:r>
+          </a:p>
+          <a:p>
+            <a:pPr>
+              <a:spcAft>
+                <a:spcPts val="600"/>
+              </a:spcAft>
+            </a:pPr>
+            <a:r>
+              <a:rPr sz="1500">
+                <a:solidFill>
+                  <a:srgbClr val="22282E"/>
+                </a:solidFill>
+              </a:rPr>
+              <a:t>•  SID — Identificador único de seguridad de un principal</a:t>
+            </a:r>
+          </a:p>
+          <a:p>
+            <a:pPr>
+              <a:spcAft>
+                <a:spcPts val="600"/>
+              </a:spcAft>
+            </a:pPr>
+            <a:r>
+              <a:rPr sz="1500">
+                <a:solidFill>
+                  <a:srgbClr val="22282E"/>
+                </a:solidFill>
+              </a:rPr>
+              <a:t>•  ACL — Lista de control de acceso de un objeto securizable</a:t>
+            </a:r>
+          </a:p>
+          <a:p>
+            <a:pPr>
+              <a:spcAft>
+                <a:spcPts val="600"/>
+              </a:spcAft>
+            </a:pPr>
+            <a:r>
+              <a:rPr sz="1500">
+                <a:solidFill>
+                  <a:srgbClr val="22282E"/>
+                </a:solidFill>
+              </a:rPr>
+              <a:t>•  Token — Estructura con la identidad y privilegios de un proceso</a:t>
+            </a:r>
+          </a:p>
+          <a:p>
+            <a:pPr>
+              <a:spcAft>
+                <a:spcPts val="600"/>
+              </a:spcAft>
+            </a:pPr>
+            <a:r>
+              <a:rPr sz="1500">
+                <a:solidFill>
+                  <a:srgbClr val="22282E"/>
+                </a:solidFill>
+              </a:rPr>
+              <a:t>•  UAC — Control de cuentas de usuario (elevación de privilegios)</a:t>
             </a:r>
           </a:p>
         </p:txBody>
@@ -4479,7 +4990,7 @@
                   <a:srgbClr val="0B3D2E"/>
                 </a:solidFill>
               </a:rPr>
-              <a:t>✍️ Ejercicios</a:t>
+              <a:t>🧰 Herramientas y preparación</a:t>
             </a:r>
           </a:p>
         </p:txBody>
@@ -4517,82 +5028,7 @@
                   <a:srgbClr val="22282E"/>
                 </a:solidFill>
               </a:rPr>
-              <a:t>•  Explica la diferencia entre HKLM y HKCU y qué implica para persistencia por usuario vs. por máquina.</a:t>
-            </a:r>
-          </a:p>
-          <a:p>
-            <a:pPr>
-              <a:spcAft>
-                <a:spcPts val="600"/>
-              </a:spcAft>
-            </a:pPr>
-            <a:r>
-              <a:rPr sz="1500">
-                <a:solidFill>
-                  <a:srgbClr val="22282E"/>
-                </a:solidFill>
-              </a:rPr>
-              <a:t>•  Investiga qué es SeImpersonatePrivilege y por qué es relevante para escalada.</a:t>
-            </a:r>
-          </a:p>
-          <a:p>
-            <a:pPr>
-              <a:spcAft>
-                <a:spcPts val="600"/>
-              </a:spcAft>
-            </a:pPr>
-            <a:r>
-              <a:rPr sz="1500">
-                <a:solidFill>
-                  <a:srgbClr val="22282E"/>
-                </a:solidFill>
-              </a:rPr>
-              <a:t>•  Encuentra en tu VM un servicio con "unquoted service path" o razona por qué no hay ninguno.</a:t>
-            </a:r>
-          </a:p>
-          <a:p>
-            <a:pPr>
-              <a:spcAft>
-                <a:spcPts val="600"/>
-              </a:spcAft>
-            </a:pPr>
-            <a:r>
-              <a:rPr sz="1500">
-                <a:solidFill>
-                  <a:srgbClr val="22282E"/>
-                </a:solidFill>
-              </a:rPr>
-              <a:t>•  Documenta 3 ubicaciones de persistencia distintas y cómo detectarlas con Autoruns.</a:t>
-            </a:r>
-          </a:p>
-          <a:p>
-            <a:pPr>
-              <a:spcAft>
-                <a:spcPts val="600"/>
-              </a:spcAft>
-            </a:pPr>
-            <a:r>
-              <a:rPr sz="1500">
-                <a:solidFill>
-                  <a:srgbClr val="22282E"/>
-                </a:solidFill>
-              </a:rPr>
-              <a:t>•  Compara UAC con sudo de Linux: similitudes y diferencias de modelo.</a:t>
-            </a:r>
-          </a:p>
-          <a:p>
-            <a:pPr>
-              <a:spcAft>
-                <a:spcPts val="600"/>
-              </a:spcAft>
-            </a:pPr>
-            <a:r>
-              <a:rPr sz="1500">
-                <a:solidFill>
-                  <a:srgbClr val="22282E"/>
-                </a:solidFill>
-              </a:rPr>
-              <a:t>•  Con el Visor de eventos, distingue un login interactivo (tipo 2) de uno de red (tipo 3).</a:t>
+              <a:t>•  Usa una VM de Windows de evaluación en tu laboratorio aislado (nunca tu equipo principal). Instala la Sysinternals Suite desde &lt;https://learn.microsoft.com/sysinternals/&gt;, especialmente Process…</a:t>
             </a:r>
           </a:p>
         </p:txBody>
@@ -4643,7 +5079,7 @@
                   <a:srgbClr val="0B3D2E"/>
                 </a:solidFill>
               </a:rPr>
-              <a:t>📝 Reto verificable</a:t>
+              <a:t>🧪 Laboratorio guiado</a:t>
             </a:r>
           </a:p>
         </p:txBody>
@@ -4681,22 +5117,97 @@
                   <a:srgbClr val="22282E"/>
                 </a:solidFill>
               </a:rPr>
-              <a:t>•  Realiza una mini auditoría de hardening de tu VM Windows: enumera cuentas y privilegios, identifica todas las entradas de auto-inicio con Autoruns marcando las no firmadas, y revisa servicios en busca de rutas sin comillas o binarios en carpetas escribibles. Entrega un informe con hallazgos y recomendaciones.</a:t>
-            </a:r>
-          </a:p>
-          <a:p>
-            <a:pPr>
-              <a:spcAft>
-                <a:spcPts val="600"/>
-              </a:spcAft>
-            </a:pPr>
-            <a:r>
-              <a:rPr sz="1500">
-                <a:solidFill>
-                  <a:srgbClr val="22282E"/>
-                </a:solidFill>
-              </a:rPr>
-              <a:t>•  Criterio de aceptación: el informe lista al menos 5 puntos de auto-inicio clasificados por riesgo, indica si existe algún servicio vulnerable (con evidencia del comando usado) y propone una mitigación por hallazgo. Reproducible por otro alumno en una VM equivalente.</a:t>
+              <a:t>•  Identidad y privilegios. En una consola, localiza tu SID, grupos y privilegios:</a:t>
+            </a:r>
+          </a:p>
+          <a:p>
+            <a:pPr>
+              <a:spcAft>
+                <a:spcPts val="600"/>
+              </a:spcAft>
+            </a:pPr>
+            <a:r>
+              <a:rPr sz="1500">
+                <a:solidFill>
+                  <a:srgbClr val="22282E"/>
+                </a:solidFill>
+              </a:rPr>
+              <a:t>•  Identifica si tienes SeDebugPrivilege o SeImpersonatePrivilege y razona qué implicarían.</a:t>
+            </a:r>
+          </a:p>
+          <a:p>
+            <a:pPr>
+              <a:spcAft>
+                <a:spcPts val="600"/>
+              </a:spcAft>
+            </a:pPr>
+            <a:r>
+              <a:rPr sz="1500">
+                <a:solidFill>
+                  <a:srgbClr val="22282E"/>
+                </a:solidFill>
+              </a:rPr>
+              <a:t>•  Explorar procesos con Process Explorer: observa el árbol de procesos, la cuenta bajo la que corre cada uno y, para uno de ellos, las DLLs cargadas.</a:t>
+            </a:r>
+          </a:p>
+          <a:p>
+            <a:pPr>
+              <a:spcAft>
+                <a:spcPts val="600"/>
+              </a:spcAft>
+            </a:pPr>
+            <a:r>
+              <a:rPr sz="1500">
+                <a:solidFill>
+                  <a:srgbClr val="22282E"/>
+                </a:solidFill>
+              </a:rPr>
+              <a:t>•  Registro y persistencia. Abre regedit y navega a las claves de auto-arranque:</a:t>
+            </a:r>
+          </a:p>
+          <a:p>
+            <a:pPr>
+              <a:spcAft>
+                <a:spcPts val="600"/>
+              </a:spcAft>
+            </a:pPr>
+            <a:r>
+              <a:rPr sz="1500">
+                <a:solidFill>
+                  <a:srgbClr val="22282E"/>
+                </a:solidFill>
+              </a:rPr>
+              <a:t>•  Anota qué se ejecuta al iniciar sesión y contrasta HKCU (usuario) con HKLM (máquina).</a:t>
+            </a:r>
+          </a:p>
+          <a:p>
+            <a:pPr>
+              <a:spcAft>
+                <a:spcPts val="600"/>
+              </a:spcAft>
+            </a:pPr>
+            <a:r>
+              <a:rPr sz="1500">
+                <a:solidFill>
+                  <a:srgbClr val="22282E"/>
+                </a:solidFill>
+              </a:rPr>
+              <a:t>•  Autoruns. Ejecútalo elevado y revisa todas las categorías de auto-inicio; marca las entradas no firmadas o de editor desconocido.</a:t>
+            </a:r>
+          </a:p>
+          <a:p>
+            <a:pPr>
+              <a:spcAft>
+                <a:spcPts val="600"/>
+              </a:spcAft>
+            </a:pPr>
+            <a:r>
+              <a:rPr sz="1500">
+                <a:solidFill>
+                  <a:srgbClr val="22282E"/>
+                </a:solidFill>
+              </a:rPr>
+              <a:t>•  Servicios. Lista servicios con su binario y busca rutas sospechosas:</a:t>
             </a:r>
           </a:p>
         </p:txBody>
